--- a/docs/presentation/trend_scout_final_project.pptx
+++ b/docs/presentation/trend_scout_final_project.pptx
@@ -5255,7 +5255,7 @@
                 <a:ea typeface="Arial" pitchFamily="34" charset="-122"/>
                 <a:cs typeface="Arial" pitchFamily="34" charset="-120"/>
               </a:rPr>
-              <a:t>Дякую! Питання?</a:t>
+              <a:t>Дякую!</a:t>
             </a:r>
             <a:endParaRPr lang="en-US" sz="2400" dirty="0"/>
           </a:p>
